--- a/tests/fixtures/templates/ビジュアルデッキ_マガジン_全レイアウト見本.pptx
+++ b/tests/fixtures/templates/ビジュアルデッキ_マガジン_全レイアウト見本.pptx
@@ -434,6 +434,36 @@
                 <a:ea typeface="Yu Gothic"/>
               </a:defRPr>
             </a:lvl1pPr>
+            <a:lvl2pPr algn="l" marL="0" indent="0">
+              <a:buNone/>
+              <a:defRPr sz="1050" b="0">
+                <a:solidFill>
+                  <a:srgbClr val="8A8580"/>
+                </a:solidFill>
+                <a:latin typeface="Yu Gothic"/>
+                <a:ea typeface="Yu Gothic"/>
+              </a:defRPr>
+            </a:lvl2pPr>
+            <a:lvl3pPr algn="l" marL="0" indent="0">
+              <a:buNone/>
+              <a:defRPr sz="900" b="0">
+                <a:solidFill>
+                  <a:srgbClr val="8A8580"/>
+                </a:solidFill>
+                <a:latin typeface="Yu Gothic"/>
+                <a:ea typeface="Yu Gothic"/>
+              </a:defRPr>
+            </a:lvl3pPr>
+            <a:lvl4pPr algn="l" marL="0" indent="0">
+              <a:buNone/>
+              <a:defRPr sz="750" b="0">
+                <a:solidFill>
+                  <a:srgbClr val="8A8580"/>
+                </a:solidFill>
+                <a:latin typeface="Yu Gothic"/>
+                <a:ea typeface="Yu Gothic"/>
+              </a:defRPr>
+            </a:lvl4pPr>
           </a:lstStyle>
           <a:p>
             <a:r>
@@ -715,6 +745,36 @@
                 <a:ea typeface="Yu Gothic"/>
               </a:defRPr>
             </a:lvl1pPr>
+            <a:lvl2pPr algn="l" marL="0" indent="0">
+              <a:buNone/>
+              <a:defRPr sz="1150" b="0">
+                <a:solidFill>
+                  <a:srgbClr val="B8AF9F"/>
+                </a:solidFill>
+                <a:latin typeface="Yu Gothic"/>
+                <a:ea typeface="Yu Gothic"/>
+              </a:defRPr>
+            </a:lvl2pPr>
+            <a:lvl3pPr algn="l" marL="0" indent="0">
+              <a:buNone/>
+              <a:defRPr sz="1000" b="0">
+                <a:solidFill>
+                  <a:srgbClr val="B8AF9F"/>
+                </a:solidFill>
+                <a:latin typeface="Yu Gothic"/>
+                <a:ea typeface="Yu Gothic"/>
+              </a:defRPr>
+            </a:lvl3pPr>
+            <a:lvl4pPr algn="l" marL="0" indent="0">
+              <a:buNone/>
+              <a:defRPr sz="800" b="0">
+                <a:solidFill>
+                  <a:srgbClr val="B8AF9F"/>
+                </a:solidFill>
+                <a:latin typeface="Yu Gothic"/>
+                <a:ea typeface="Yu Gothic"/>
+              </a:defRPr>
+            </a:lvl4pPr>
           </a:lstStyle>
           <a:p>
             <a:r>
@@ -901,6 +961,20 @@
                 </a:solidFill>
               </a:defRPr>
             </a:lvl1pPr>
+            <a:lvl2pPr algn="l">
+              <a:defRPr sz="1750" b="0">
+                <a:solidFill>
+                  <a:srgbClr val="1A1A1A"/>
+                </a:solidFill>
+              </a:defRPr>
+            </a:lvl2pPr>
+            <a:lvl3pPr algn="l">
+              <a:defRPr sz="1500" b="0">
+                <a:solidFill>
+                  <a:srgbClr val="1A1A1A"/>
+                </a:solidFill>
+              </a:defRPr>
+            </a:lvl3pPr>
           </a:lstStyle>
           <a:p>
             <a:pPr lvl="0"/>
@@ -1258,6 +1332,39 @@
                 <a:cs typeface="Yu Gothic"/>
               </a:defRPr>
             </a:lvl1pPr>
+            <a:lvl2pPr algn="l" marL="0" indent="0">
+              <a:buNone/>
+              <a:defRPr sz="1150" b="1">
+                <a:solidFill>
+                  <a:srgbClr val="8A8580"/>
+                </a:solidFill>
+                <a:latin typeface="Yu Gothic"/>
+                <a:ea typeface="Yu Gothic"/>
+                <a:cs typeface="Yu Gothic"/>
+              </a:defRPr>
+            </a:lvl2pPr>
+            <a:lvl3pPr algn="l" marL="0" indent="0">
+              <a:buNone/>
+              <a:defRPr sz="1000" b="1">
+                <a:solidFill>
+                  <a:srgbClr val="8A8580"/>
+                </a:solidFill>
+                <a:latin typeface="Yu Gothic"/>
+                <a:ea typeface="Yu Gothic"/>
+                <a:cs typeface="Yu Gothic"/>
+              </a:defRPr>
+            </a:lvl3pPr>
+            <a:lvl4pPr algn="l" marL="0" indent="0">
+              <a:buNone/>
+              <a:defRPr sz="800" b="1">
+                <a:solidFill>
+                  <a:srgbClr val="8A8580"/>
+                </a:solidFill>
+                <a:latin typeface="Yu Gothic"/>
+                <a:ea typeface="Yu Gothic"/>
+                <a:cs typeface="Yu Gothic"/>
+              </a:defRPr>
+            </a:lvl4pPr>
           </a:lstStyle>
           <a:p>
             <a:r>
@@ -1336,6 +1443,39 @@
                 <a:cs typeface="Yu Gothic"/>
               </a:defRPr>
             </a:lvl1pPr>
+            <a:lvl2pPr algn="l" marL="0" indent="0">
+              <a:buNone/>
+              <a:defRPr sz="1150" b="0">
+                <a:solidFill>
+                  <a:srgbClr val="21201E"/>
+                </a:solidFill>
+                <a:latin typeface="Yu Gothic"/>
+                <a:ea typeface="Yu Gothic"/>
+                <a:cs typeface="Yu Gothic"/>
+              </a:defRPr>
+            </a:lvl2pPr>
+            <a:lvl3pPr algn="l" marL="0" indent="0">
+              <a:buNone/>
+              <a:defRPr sz="1000" b="0">
+                <a:solidFill>
+                  <a:srgbClr val="21201E"/>
+                </a:solidFill>
+                <a:latin typeface="Yu Gothic"/>
+                <a:ea typeface="Yu Gothic"/>
+                <a:cs typeface="Yu Gothic"/>
+              </a:defRPr>
+            </a:lvl3pPr>
+            <a:lvl4pPr algn="l" marL="0" indent="0">
+              <a:buNone/>
+              <a:defRPr sz="800" b="0">
+                <a:solidFill>
+                  <a:srgbClr val="21201E"/>
+                </a:solidFill>
+                <a:latin typeface="Yu Gothic"/>
+                <a:ea typeface="Yu Gothic"/>
+                <a:cs typeface="Yu Gothic"/>
+              </a:defRPr>
+            </a:lvl4pPr>
           </a:lstStyle>
           <a:p>
             <a:r>
@@ -1375,6 +1515,39 @@
                 <a:cs typeface="Yu Gothic"/>
               </a:defRPr>
             </a:lvl1pPr>
+            <a:lvl2pPr algn="l" marL="0" indent="0">
+              <a:buNone/>
+              <a:defRPr sz="1150" b="1">
+                <a:solidFill>
+                  <a:srgbClr val="8A8580"/>
+                </a:solidFill>
+                <a:latin typeface="Yu Gothic"/>
+                <a:ea typeface="Yu Gothic"/>
+                <a:cs typeface="Yu Gothic"/>
+              </a:defRPr>
+            </a:lvl2pPr>
+            <a:lvl3pPr algn="l" marL="0" indent="0">
+              <a:buNone/>
+              <a:defRPr sz="1000" b="1">
+                <a:solidFill>
+                  <a:srgbClr val="8A8580"/>
+                </a:solidFill>
+                <a:latin typeface="Yu Gothic"/>
+                <a:ea typeface="Yu Gothic"/>
+                <a:cs typeface="Yu Gothic"/>
+              </a:defRPr>
+            </a:lvl3pPr>
+            <a:lvl4pPr algn="l" marL="0" indent="0">
+              <a:buNone/>
+              <a:defRPr sz="800" b="1">
+                <a:solidFill>
+                  <a:srgbClr val="8A8580"/>
+                </a:solidFill>
+                <a:latin typeface="Yu Gothic"/>
+                <a:ea typeface="Yu Gothic"/>
+                <a:cs typeface="Yu Gothic"/>
+              </a:defRPr>
+            </a:lvl4pPr>
           </a:lstStyle>
           <a:p>
             <a:r>
@@ -1453,6 +1626,39 @@
                 <a:cs typeface="Yu Gothic"/>
               </a:defRPr>
             </a:lvl1pPr>
+            <a:lvl2pPr algn="l" marL="0" indent="0">
+              <a:buNone/>
+              <a:defRPr sz="1150" b="0">
+                <a:solidFill>
+                  <a:srgbClr val="21201E"/>
+                </a:solidFill>
+                <a:latin typeface="Yu Gothic"/>
+                <a:ea typeface="Yu Gothic"/>
+                <a:cs typeface="Yu Gothic"/>
+              </a:defRPr>
+            </a:lvl2pPr>
+            <a:lvl3pPr algn="l" marL="0" indent="0">
+              <a:buNone/>
+              <a:defRPr sz="1000" b="0">
+                <a:solidFill>
+                  <a:srgbClr val="21201E"/>
+                </a:solidFill>
+                <a:latin typeface="Yu Gothic"/>
+                <a:ea typeface="Yu Gothic"/>
+                <a:cs typeface="Yu Gothic"/>
+              </a:defRPr>
+            </a:lvl3pPr>
+            <a:lvl4pPr algn="l" marL="0" indent="0">
+              <a:buNone/>
+              <a:defRPr sz="800" b="0">
+                <a:solidFill>
+                  <a:srgbClr val="21201E"/>
+                </a:solidFill>
+                <a:latin typeface="Yu Gothic"/>
+                <a:ea typeface="Yu Gothic"/>
+                <a:cs typeface="Yu Gothic"/>
+              </a:defRPr>
+            </a:lvl4pPr>
           </a:lstStyle>
           <a:p>
             <a:r>
@@ -1492,6 +1698,39 @@
                 <a:cs typeface="Yu Gothic"/>
               </a:defRPr>
             </a:lvl1pPr>
+            <a:lvl2pPr algn="l" marL="0" indent="0">
+              <a:buNone/>
+              <a:defRPr sz="1150" b="1">
+                <a:solidFill>
+                  <a:srgbClr val="8A8580"/>
+                </a:solidFill>
+                <a:latin typeface="Yu Gothic"/>
+                <a:ea typeface="Yu Gothic"/>
+                <a:cs typeface="Yu Gothic"/>
+              </a:defRPr>
+            </a:lvl2pPr>
+            <a:lvl3pPr algn="l" marL="0" indent="0">
+              <a:buNone/>
+              <a:defRPr sz="1000" b="1">
+                <a:solidFill>
+                  <a:srgbClr val="8A8580"/>
+                </a:solidFill>
+                <a:latin typeface="Yu Gothic"/>
+                <a:ea typeface="Yu Gothic"/>
+                <a:cs typeface="Yu Gothic"/>
+              </a:defRPr>
+            </a:lvl3pPr>
+            <a:lvl4pPr algn="l" marL="0" indent="0">
+              <a:buNone/>
+              <a:defRPr sz="800" b="1">
+                <a:solidFill>
+                  <a:srgbClr val="8A8580"/>
+                </a:solidFill>
+                <a:latin typeface="Yu Gothic"/>
+                <a:ea typeface="Yu Gothic"/>
+                <a:cs typeface="Yu Gothic"/>
+              </a:defRPr>
+            </a:lvl4pPr>
           </a:lstStyle>
           <a:p>
             <a:r>
@@ -1570,6 +1809,39 @@
                 <a:cs typeface="Yu Gothic"/>
               </a:defRPr>
             </a:lvl1pPr>
+            <a:lvl2pPr algn="l" marL="0" indent="0">
+              <a:buNone/>
+              <a:defRPr sz="1150" b="0">
+                <a:solidFill>
+                  <a:srgbClr val="21201E"/>
+                </a:solidFill>
+                <a:latin typeface="Yu Gothic"/>
+                <a:ea typeface="Yu Gothic"/>
+                <a:cs typeface="Yu Gothic"/>
+              </a:defRPr>
+            </a:lvl2pPr>
+            <a:lvl3pPr algn="l" marL="0" indent="0">
+              <a:buNone/>
+              <a:defRPr sz="1000" b="0">
+                <a:solidFill>
+                  <a:srgbClr val="21201E"/>
+                </a:solidFill>
+                <a:latin typeface="Yu Gothic"/>
+                <a:ea typeface="Yu Gothic"/>
+                <a:cs typeface="Yu Gothic"/>
+              </a:defRPr>
+            </a:lvl3pPr>
+            <a:lvl4pPr algn="l" marL="0" indent="0">
+              <a:buNone/>
+              <a:defRPr sz="800" b="0">
+                <a:solidFill>
+                  <a:srgbClr val="21201E"/>
+                </a:solidFill>
+                <a:latin typeface="Yu Gothic"/>
+                <a:ea typeface="Yu Gothic"/>
+                <a:cs typeface="Yu Gothic"/>
+              </a:defRPr>
+            </a:lvl4pPr>
           </a:lstStyle>
           <a:p>
             <a:r>
@@ -1895,6 +2167,39 @@
                 <a:cs typeface="Yu Gothic"/>
               </a:defRPr>
             </a:lvl1pPr>
+            <a:lvl2pPr algn="l" marL="0" indent="0">
+              <a:buNone/>
+              <a:defRPr sz="1500" b="1">
+                <a:solidFill>
+                  <a:srgbClr val="21201E"/>
+                </a:solidFill>
+                <a:latin typeface="Yu Gothic"/>
+                <a:ea typeface="Yu Gothic"/>
+                <a:cs typeface="Yu Gothic"/>
+              </a:defRPr>
+            </a:lvl2pPr>
+            <a:lvl3pPr algn="l" marL="0" indent="0">
+              <a:buNone/>
+              <a:defRPr sz="1300" b="1">
+                <a:solidFill>
+                  <a:srgbClr val="21201E"/>
+                </a:solidFill>
+                <a:latin typeface="Yu Gothic"/>
+                <a:ea typeface="Yu Gothic"/>
+                <a:cs typeface="Yu Gothic"/>
+              </a:defRPr>
+            </a:lvl3pPr>
+            <a:lvl4pPr algn="l" marL="0" indent="0">
+              <a:buNone/>
+              <a:defRPr sz="1050" b="1">
+                <a:solidFill>
+                  <a:srgbClr val="21201E"/>
+                </a:solidFill>
+                <a:latin typeface="Yu Gothic"/>
+                <a:ea typeface="Yu Gothic"/>
+                <a:cs typeface="Yu Gothic"/>
+              </a:defRPr>
+            </a:lvl4pPr>
           </a:lstStyle>
           <a:p>
             <a:r>
@@ -1934,6 +2239,39 @@
                 <a:cs typeface="Yu Gothic"/>
               </a:defRPr>
             </a:lvl1pPr>
+            <a:lvl2pPr algn="l" marL="0" indent="0">
+              <a:buNone/>
+              <a:defRPr sz="1050" b="0">
+                <a:solidFill>
+                  <a:srgbClr val="8A8580"/>
+                </a:solidFill>
+                <a:latin typeface="Yu Gothic"/>
+                <a:ea typeface="Yu Gothic"/>
+                <a:cs typeface="Yu Gothic"/>
+              </a:defRPr>
+            </a:lvl2pPr>
+            <a:lvl3pPr algn="l" marL="0" indent="0">
+              <a:buNone/>
+              <a:defRPr sz="900" b="0">
+                <a:solidFill>
+                  <a:srgbClr val="8A8580"/>
+                </a:solidFill>
+                <a:latin typeface="Yu Gothic"/>
+                <a:ea typeface="Yu Gothic"/>
+                <a:cs typeface="Yu Gothic"/>
+              </a:defRPr>
+            </a:lvl3pPr>
+            <a:lvl4pPr algn="l" marL="0" indent="0">
+              <a:buNone/>
+              <a:defRPr sz="750" b="0">
+                <a:solidFill>
+                  <a:srgbClr val="8A8580"/>
+                </a:solidFill>
+                <a:latin typeface="Yu Gothic"/>
+                <a:ea typeface="Yu Gothic"/>
+                <a:cs typeface="Yu Gothic"/>
+              </a:defRPr>
+            </a:lvl4pPr>
           </a:lstStyle>
           <a:p>
             <a:r>
@@ -1973,6 +2311,39 @@
                 <a:cs typeface="Yu Gothic"/>
               </a:defRPr>
             </a:lvl1pPr>
+            <a:lvl2pPr algn="l" marL="0" indent="0">
+              <a:buNone/>
+              <a:defRPr sz="1500" b="1">
+                <a:solidFill>
+                  <a:srgbClr val="21201E"/>
+                </a:solidFill>
+                <a:latin typeface="Yu Gothic"/>
+                <a:ea typeface="Yu Gothic"/>
+                <a:cs typeface="Yu Gothic"/>
+              </a:defRPr>
+            </a:lvl2pPr>
+            <a:lvl3pPr algn="l" marL="0" indent="0">
+              <a:buNone/>
+              <a:defRPr sz="1300" b="1">
+                <a:solidFill>
+                  <a:srgbClr val="21201E"/>
+                </a:solidFill>
+                <a:latin typeface="Yu Gothic"/>
+                <a:ea typeface="Yu Gothic"/>
+                <a:cs typeface="Yu Gothic"/>
+              </a:defRPr>
+            </a:lvl3pPr>
+            <a:lvl4pPr algn="l" marL="0" indent="0">
+              <a:buNone/>
+              <a:defRPr sz="1050" b="1">
+                <a:solidFill>
+                  <a:srgbClr val="21201E"/>
+                </a:solidFill>
+                <a:latin typeface="Yu Gothic"/>
+                <a:ea typeface="Yu Gothic"/>
+                <a:cs typeface="Yu Gothic"/>
+              </a:defRPr>
+            </a:lvl4pPr>
           </a:lstStyle>
           <a:p>
             <a:r>
@@ -2012,6 +2383,39 @@
                 <a:cs typeface="Yu Gothic"/>
               </a:defRPr>
             </a:lvl1pPr>
+            <a:lvl2pPr algn="l" marL="0" indent="0">
+              <a:buNone/>
+              <a:defRPr sz="1050" b="0">
+                <a:solidFill>
+                  <a:srgbClr val="8A8580"/>
+                </a:solidFill>
+                <a:latin typeface="Yu Gothic"/>
+                <a:ea typeface="Yu Gothic"/>
+                <a:cs typeface="Yu Gothic"/>
+              </a:defRPr>
+            </a:lvl2pPr>
+            <a:lvl3pPr algn="l" marL="0" indent="0">
+              <a:buNone/>
+              <a:defRPr sz="900" b="0">
+                <a:solidFill>
+                  <a:srgbClr val="8A8580"/>
+                </a:solidFill>
+                <a:latin typeface="Yu Gothic"/>
+                <a:ea typeface="Yu Gothic"/>
+                <a:cs typeface="Yu Gothic"/>
+              </a:defRPr>
+            </a:lvl3pPr>
+            <a:lvl4pPr algn="l" marL="0" indent="0">
+              <a:buNone/>
+              <a:defRPr sz="750" b="0">
+                <a:solidFill>
+                  <a:srgbClr val="8A8580"/>
+                </a:solidFill>
+                <a:latin typeface="Yu Gothic"/>
+                <a:ea typeface="Yu Gothic"/>
+                <a:cs typeface="Yu Gothic"/>
+              </a:defRPr>
+            </a:lvl4pPr>
           </a:lstStyle>
           <a:p>
             <a:r>
@@ -2051,6 +2455,39 @@
                 <a:cs typeface="Yu Gothic"/>
               </a:defRPr>
             </a:lvl1pPr>
+            <a:lvl2pPr algn="l" marL="0" indent="0">
+              <a:buNone/>
+              <a:defRPr sz="1500" b="1">
+                <a:solidFill>
+                  <a:srgbClr val="21201E"/>
+                </a:solidFill>
+                <a:latin typeface="Yu Gothic"/>
+                <a:ea typeface="Yu Gothic"/>
+                <a:cs typeface="Yu Gothic"/>
+              </a:defRPr>
+            </a:lvl2pPr>
+            <a:lvl3pPr algn="l" marL="0" indent="0">
+              <a:buNone/>
+              <a:defRPr sz="1300" b="1">
+                <a:solidFill>
+                  <a:srgbClr val="21201E"/>
+                </a:solidFill>
+                <a:latin typeface="Yu Gothic"/>
+                <a:ea typeface="Yu Gothic"/>
+                <a:cs typeface="Yu Gothic"/>
+              </a:defRPr>
+            </a:lvl3pPr>
+            <a:lvl4pPr algn="l" marL="0" indent="0">
+              <a:buNone/>
+              <a:defRPr sz="1050" b="1">
+                <a:solidFill>
+                  <a:srgbClr val="21201E"/>
+                </a:solidFill>
+                <a:latin typeface="Yu Gothic"/>
+                <a:ea typeface="Yu Gothic"/>
+                <a:cs typeface="Yu Gothic"/>
+              </a:defRPr>
+            </a:lvl4pPr>
           </a:lstStyle>
           <a:p>
             <a:r>
@@ -2090,6 +2527,39 @@
                 <a:cs typeface="Yu Gothic"/>
               </a:defRPr>
             </a:lvl1pPr>
+            <a:lvl2pPr algn="l" marL="0" indent="0">
+              <a:buNone/>
+              <a:defRPr sz="1050" b="0">
+                <a:solidFill>
+                  <a:srgbClr val="8A8580"/>
+                </a:solidFill>
+                <a:latin typeface="Yu Gothic"/>
+                <a:ea typeface="Yu Gothic"/>
+                <a:cs typeface="Yu Gothic"/>
+              </a:defRPr>
+            </a:lvl2pPr>
+            <a:lvl3pPr algn="l" marL="0" indent="0">
+              <a:buNone/>
+              <a:defRPr sz="900" b="0">
+                <a:solidFill>
+                  <a:srgbClr val="8A8580"/>
+                </a:solidFill>
+                <a:latin typeface="Yu Gothic"/>
+                <a:ea typeface="Yu Gothic"/>
+                <a:cs typeface="Yu Gothic"/>
+              </a:defRPr>
+            </a:lvl3pPr>
+            <a:lvl4pPr algn="l" marL="0" indent="0">
+              <a:buNone/>
+              <a:defRPr sz="750" b="0">
+                <a:solidFill>
+                  <a:srgbClr val="8A8580"/>
+                </a:solidFill>
+                <a:latin typeface="Yu Gothic"/>
+                <a:ea typeface="Yu Gothic"/>
+                <a:cs typeface="Yu Gothic"/>
+              </a:defRPr>
+            </a:lvl4pPr>
           </a:lstStyle>
           <a:p>
             <a:r>
@@ -2466,6 +2936,39 @@
                 <a:cs typeface="Yu Gothic"/>
               </a:defRPr>
             </a:lvl1pPr>
+            <a:lvl2pPr algn="ctr" marL="0" indent="0">
+              <a:buNone/>
+              <a:defRPr sz="1050" b="1">
+                <a:solidFill>
+                  <a:srgbClr val="8A8580"/>
+                </a:solidFill>
+                <a:latin typeface="Yu Gothic"/>
+                <a:ea typeface="Yu Gothic"/>
+                <a:cs typeface="Yu Gothic"/>
+              </a:defRPr>
+            </a:lvl2pPr>
+            <a:lvl3pPr algn="ctr" marL="0" indent="0">
+              <a:buNone/>
+              <a:defRPr sz="900" b="1">
+                <a:solidFill>
+                  <a:srgbClr val="8A8580"/>
+                </a:solidFill>
+                <a:latin typeface="Yu Gothic"/>
+                <a:ea typeface="Yu Gothic"/>
+                <a:cs typeface="Yu Gothic"/>
+              </a:defRPr>
+            </a:lvl3pPr>
+            <a:lvl4pPr algn="ctr" marL="0" indent="0">
+              <a:buNone/>
+              <a:defRPr sz="750" b="1">
+                <a:solidFill>
+                  <a:srgbClr val="8A8580"/>
+                </a:solidFill>
+                <a:latin typeface="Yu Gothic"/>
+                <a:ea typeface="Yu Gothic"/>
+                <a:cs typeface="Yu Gothic"/>
+              </a:defRPr>
+            </a:lvl4pPr>
           </a:lstStyle>
           <a:p>
             <a:r>
@@ -2505,6 +3008,39 @@
                 <a:cs typeface="Yu Gothic"/>
               </a:defRPr>
             </a:lvl1pPr>
+            <a:lvl2pPr algn="ctr" marL="0" indent="0">
+              <a:buNone/>
+              <a:defRPr sz="1600" b="1">
+                <a:solidFill>
+                  <a:srgbClr val="21201E"/>
+                </a:solidFill>
+                <a:latin typeface="Yu Gothic"/>
+                <a:ea typeface="Yu Gothic"/>
+                <a:cs typeface="Yu Gothic"/>
+              </a:defRPr>
+            </a:lvl2pPr>
+            <a:lvl3pPr algn="ctr" marL="0" indent="0">
+              <a:buNone/>
+              <a:defRPr sz="1350" b="1">
+                <a:solidFill>
+                  <a:srgbClr val="21201E"/>
+                </a:solidFill>
+                <a:latin typeface="Yu Gothic"/>
+                <a:ea typeface="Yu Gothic"/>
+                <a:cs typeface="Yu Gothic"/>
+              </a:defRPr>
+            </a:lvl3pPr>
+            <a:lvl4pPr algn="ctr" marL="0" indent="0">
+              <a:buNone/>
+              <a:defRPr sz="1150" b="1">
+                <a:solidFill>
+                  <a:srgbClr val="21201E"/>
+                </a:solidFill>
+                <a:latin typeface="Yu Gothic"/>
+                <a:ea typeface="Yu Gothic"/>
+                <a:cs typeface="Yu Gothic"/>
+              </a:defRPr>
+            </a:lvl4pPr>
           </a:lstStyle>
           <a:p>
             <a:r>
@@ -2544,6 +3080,39 @@
                 <a:cs typeface="Yu Gothic"/>
               </a:defRPr>
             </a:lvl1pPr>
+            <a:lvl2pPr algn="ctr" marL="0" indent="0">
+              <a:buNone/>
+              <a:defRPr sz="1050" b="0">
+                <a:solidFill>
+                  <a:srgbClr val="8A8580"/>
+                </a:solidFill>
+                <a:latin typeface="Yu Gothic"/>
+                <a:ea typeface="Yu Gothic"/>
+                <a:cs typeface="Yu Gothic"/>
+              </a:defRPr>
+            </a:lvl2pPr>
+            <a:lvl3pPr algn="ctr" marL="0" indent="0">
+              <a:buNone/>
+              <a:defRPr sz="900" b="0">
+                <a:solidFill>
+                  <a:srgbClr val="8A8580"/>
+                </a:solidFill>
+                <a:latin typeface="Yu Gothic"/>
+                <a:ea typeface="Yu Gothic"/>
+                <a:cs typeface="Yu Gothic"/>
+              </a:defRPr>
+            </a:lvl3pPr>
+            <a:lvl4pPr algn="ctr" marL="0" indent="0">
+              <a:buNone/>
+              <a:defRPr sz="750" b="0">
+                <a:solidFill>
+                  <a:srgbClr val="8A8580"/>
+                </a:solidFill>
+                <a:latin typeface="Yu Gothic"/>
+                <a:ea typeface="Yu Gothic"/>
+                <a:cs typeface="Yu Gothic"/>
+              </a:defRPr>
+            </a:lvl4pPr>
           </a:lstStyle>
           <a:p>
             <a:r>
@@ -2583,6 +3152,39 @@
                 <a:cs typeface="Yu Gothic"/>
               </a:defRPr>
             </a:lvl1pPr>
+            <a:lvl2pPr algn="ctr" marL="0" indent="0">
+              <a:buNone/>
+              <a:defRPr sz="1050" b="1">
+                <a:solidFill>
+                  <a:srgbClr val="8A8580"/>
+                </a:solidFill>
+                <a:latin typeface="Yu Gothic"/>
+                <a:ea typeface="Yu Gothic"/>
+                <a:cs typeface="Yu Gothic"/>
+              </a:defRPr>
+            </a:lvl2pPr>
+            <a:lvl3pPr algn="ctr" marL="0" indent="0">
+              <a:buNone/>
+              <a:defRPr sz="900" b="1">
+                <a:solidFill>
+                  <a:srgbClr val="8A8580"/>
+                </a:solidFill>
+                <a:latin typeface="Yu Gothic"/>
+                <a:ea typeface="Yu Gothic"/>
+                <a:cs typeface="Yu Gothic"/>
+              </a:defRPr>
+            </a:lvl3pPr>
+            <a:lvl4pPr algn="ctr" marL="0" indent="0">
+              <a:buNone/>
+              <a:defRPr sz="750" b="1">
+                <a:solidFill>
+                  <a:srgbClr val="8A8580"/>
+                </a:solidFill>
+                <a:latin typeface="Yu Gothic"/>
+                <a:ea typeface="Yu Gothic"/>
+                <a:cs typeface="Yu Gothic"/>
+              </a:defRPr>
+            </a:lvl4pPr>
           </a:lstStyle>
           <a:p>
             <a:r>
@@ -2622,6 +3224,39 @@
                 <a:cs typeface="Yu Gothic"/>
               </a:defRPr>
             </a:lvl1pPr>
+            <a:lvl2pPr algn="ctr" marL="0" indent="0">
+              <a:buNone/>
+              <a:defRPr sz="1600" b="1">
+                <a:solidFill>
+                  <a:srgbClr val="21201E"/>
+                </a:solidFill>
+                <a:latin typeface="Yu Gothic"/>
+                <a:ea typeface="Yu Gothic"/>
+                <a:cs typeface="Yu Gothic"/>
+              </a:defRPr>
+            </a:lvl2pPr>
+            <a:lvl3pPr algn="ctr" marL="0" indent="0">
+              <a:buNone/>
+              <a:defRPr sz="1350" b="1">
+                <a:solidFill>
+                  <a:srgbClr val="21201E"/>
+                </a:solidFill>
+                <a:latin typeface="Yu Gothic"/>
+                <a:ea typeface="Yu Gothic"/>
+                <a:cs typeface="Yu Gothic"/>
+              </a:defRPr>
+            </a:lvl3pPr>
+            <a:lvl4pPr algn="ctr" marL="0" indent="0">
+              <a:buNone/>
+              <a:defRPr sz="1150" b="1">
+                <a:solidFill>
+                  <a:srgbClr val="21201E"/>
+                </a:solidFill>
+                <a:latin typeface="Yu Gothic"/>
+                <a:ea typeface="Yu Gothic"/>
+                <a:cs typeface="Yu Gothic"/>
+              </a:defRPr>
+            </a:lvl4pPr>
           </a:lstStyle>
           <a:p>
             <a:r>
@@ -2661,6 +3296,39 @@
                 <a:cs typeface="Yu Gothic"/>
               </a:defRPr>
             </a:lvl1pPr>
+            <a:lvl2pPr algn="ctr" marL="0" indent="0">
+              <a:buNone/>
+              <a:defRPr sz="1050" b="0">
+                <a:solidFill>
+                  <a:srgbClr val="8A8580"/>
+                </a:solidFill>
+                <a:latin typeface="Yu Gothic"/>
+                <a:ea typeface="Yu Gothic"/>
+                <a:cs typeface="Yu Gothic"/>
+              </a:defRPr>
+            </a:lvl2pPr>
+            <a:lvl3pPr algn="ctr" marL="0" indent="0">
+              <a:buNone/>
+              <a:defRPr sz="900" b="0">
+                <a:solidFill>
+                  <a:srgbClr val="8A8580"/>
+                </a:solidFill>
+                <a:latin typeface="Yu Gothic"/>
+                <a:ea typeface="Yu Gothic"/>
+                <a:cs typeface="Yu Gothic"/>
+              </a:defRPr>
+            </a:lvl3pPr>
+            <a:lvl4pPr algn="ctr" marL="0" indent="0">
+              <a:buNone/>
+              <a:defRPr sz="750" b="0">
+                <a:solidFill>
+                  <a:srgbClr val="8A8580"/>
+                </a:solidFill>
+                <a:latin typeface="Yu Gothic"/>
+                <a:ea typeface="Yu Gothic"/>
+                <a:cs typeface="Yu Gothic"/>
+              </a:defRPr>
+            </a:lvl4pPr>
           </a:lstStyle>
           <a:p>
             <a:r>
@@ -2700,6 +3368,39 @@
                 <a:cs typeface="Yu Gothic"/>
               </a:defRPr>
             </a:lvl1pPr>
+            <a:lvl2pPr algn="ctr" marL="0" indent="0">
+              <a:buNone/>
+              <a:defRPr sz="1050" b="1">
+                <a:solidFill>
+                  <a:srgbClr val="8A8580"/>
+                </a:solidFill>
+                <a:latin typeface="Yu Gothic"/>
+                <a:ea typeface="Yu Gothic"/>
+                <a:cs typeface="Yu Gothic"/>
+              </a:defRPr>
+            </a:lvl2pPr>
+            <a:lvl3pPr algn="ctr" marL="0" indent="0">
+              <a:buNone/>
+              <a:defRPr sz="900" b="1">
+                <a:solidFill>
+                  <a:srgbClr val="8A8580"/>
+                </a:solidFill>
+                <a:latin typeface="Yu Gothic"/>
+                <a:ea typeface="Yu Gothic"/>
+                <a:cs typeface="Yu Gothic"/>
+              </a:defRPr>
+            </a:lvl3pPr>
+            <a:lvl4pPr algn="ctr" marL="0" indent="0">
+              <a:buNone/>
+              <a:defRPr sz="750" b="1">
+                <a:solidFill>
+                  <a:srgbClr val="8A8580"/>
+                </a:solidFill>
+                <a:latin typeface="Yu Gothic"/>
+                <a:ea typeface="Yu Gothic"/>
+                <a:cs typeface="Yu Gothic"/>
+              </a:defRPr>
+            </a:lvl4pPr>
           </a:lstStyle>
           <a:p>
             <a:r>
@@ -2739,6 +3440,39 @@
                 <a:cs typeface="Yu Gothic"/>
               </a:defRPr>
             </a:lvl1pPr>
+            <a:lvl2pPr algn="ctr" marL="0" indent="0">
+              <a:buNone/>
+              <a:defRPr sz="1600" b="1">
+                <a:solidFill>
+                  <a:srgbClr val="21201E"/>
+                </a:solidFill>
+                <a:latin typeface="Yu Gothic"/>
+                <a:ea typeface="Yu Gothic"/>
+                <a:cs typeface="Yu Gothic"/>
+              </a:defRPr>
+            </a:lvl2pPr>
+            <a:lvl3pPr algn="ctr" marL="0" indent="0">
+              <a:buNone/>
+              <a:defRPr sz="1350" b="1">
+                <a:solidFill>
+                  <a:srgbClr val="21201E"/>
+                </a:solidFill>
+                <a:latin typeface="Yu Gothic"/>
+                <a:ea typeface="Yu Gothic"/>
+                <a:cs typeface="Yu Gothic"/>
+              </a:defRPr>
+            </a:lvl3pPr>
+            <a:lvl4pPr algn="ctr" marL="0" indent="0">
+              <a:buNone/>
+              <a:defRPr sz="1150" b="1">
+                <a:solidFill>
+                  <a:srgbClr val="21201E"/>
+                </a:solidFill>
+                <a:latin typeface="Yu Gothic"/>
+                <a:ea typeface="Yu Gothic"/>
+                <a:cs typeface="Yu Gothic"/>
+              </a:defRPr>
+            </a:lvl4pPr>
           </a:lstStyle>
           <a:p>
             <a:r>
@@ -2778,6 +3512,39 @@
                 <a:cs typeface="Yu Gothic"/>
               </a:defRPr>
             </a:lvl1pPr>
+            <a:lvl2pPr algn="ctr" marL="0" indent="0">
+              <a:buNone/>
+              <a:defRPr sz="1050" b="0">
+                <a:solidFill>
+                  <a:srgbClr val="8A8580"/>
+                </a:solidFill>
+                <a:latin typeface="Yu Gothic"/>
+                <a:ea typeface="Yu Gothic"/>
+                <a:cs typeface="Yu Gothic"/>
+              </a:defRPr>
+            </a:lvl2pPr>
+            <a:lvl3pPr algn="ctr" marL="0" indent="0">
+              <a:buNone/>
+              <a:defRPr sz="900" b="0">
+                <a:solidFill>
+                  <a:srgbClr val="8A8580"/>
+                </a:solidFill>
+                <a:latin typeface="Yu Gothic"/>
+                <a:ea typeface="Yu Gothic"/>
+                <a:cs typeface="Yu Gothic"/>
+              </a:defRPr>
+            </a:lvl3pPr>
+            <a:lvl4pPr algn="ctr" marL="0" indent="0">
+              <a:buNone/>
+              <a:defRPr sz="750" b="0">
+                <a:solidFill>
+                  <a:srgbClr val="8A8580"/>
+                </a:solidFill>
+                <a:latin typeface="Yu Gothic"/>
+                <a:ea typeface="Yu Gothic"/>
+                <a:cs typeface="Yu Gothic"/>
+              </a:defRPr>
+            </a:lvl4pPr>
           </a:lstStyle>
           <a:p>
             <a:r>
@@ -2817,6 +3584,39 @@
                 <a:cs typeface="Yu Gothic"/>
               </a:defRPr>
             </a:lvl1pPr>
+            <a:lvl2pPr algn="ctr" marL="0" indent="0">
+              <a:buNone/>
+              <a:defRPr sz="1050" b="1">
+                <a:solidFill>
+                  <a:srgbClr val="8A8580"/>
+                </a:solidFill>
+                <a:latin typeface="Yu Gothic"/>
+                <a:ea typeface="Yu Gothic"/>
+                <a:cs typeface="Yu Gothic"/>
+              </a:defRPr>
+            </a:lvl2pPr>
+            <a:lvl3pPr algn="ctr" marL="0" indent="0">
+              <a:buNone/>
+              <a:defRPr sz="900" b="1">
+                <a:solidFill>
+                  <a:srgbClr val="8A8580"/>
+                </a:solidFill>
+                <a:latin typeface="Yu Gothic"/>
+                <a:ea typeface="Yu Gothic"/>
+                <a:cs typeface="Yu Gothic"/>
+              </a:defRPr>
+            </a:lvl3pPr>
+            <a:lvl4pPr algn="ctr" marL="0" indent="0">
+              <a:buNone/>
+              <a:defRPr sz="750" b="1">
+                <a:solidFill>
+                  <a:srgbClr val="8A8580"/>
+                </a:solidFill>
+                <a:latin typeface="Yu Gothic"/>
+                <a:ea typeface="Yu Gothic"/>
+                <a:cs typeface="Yu Gothic"/>
+              </a:defRPr>
+            </a:lvl4pPr>
           </a:lstStyle>
           <a:p>
             <a:r>
@@ -2856,6 +3656,39 @@
                 <a:cs typeface="Yu Gothic"/>
               </a:defRPr>
             </a:lvl1pPr>
+            <a:lvl2pPr algn="ctr" marL="0" indent="0">
+              <a:buNone/>
+              <a:defRPr sz="1600" b="1">
+                <a:solidFill>
+                  <a:srgbClr val="21201E"/>
+                </a:solidFill>
+                <a:latin typeface="Yu Gothic"/>
+                <a:ea typeface="Yu Gothic"/>
+                <a:cs typeface="Yu Gothic"/>
+              </a:defRPr>
+            </a:lvl2pPr>
+            <a:lvl3pPr algn="ctr" marL="0" indent="0">
+              <a:buNone/>
+              <a:defRPr sz="1350" b="1">
+                <a:solidFill>
+                  <a:srgbClr val="21201E"/>
+                </a:solidFill>
+                <a:latin typeface="Yu Gothic"/>
+                <a:ea typeface="Yu Gothic"/>
+                <a:cs typeface="Yu Gothic"/>
+              </a:defRPr>
+            </a:lvl3pPr>
+            <a:lvl4pPr algn="ctr" marL="0" indent="0">
+              <a:buNone/>
+              <a:defRPr sz="1150" b="1">
+                <a:solidFill>
+                  <a:srgbClr val="21201E"/>
+                </a:solidFill>
+                <a:latin typeface="Yu Gothic"/>
+                <a:ea typeface="Yu Gothic"/>
+                <a:cs typeface="Yu Gothic"/>
+              </a:defRPr>
+            </a:lvl4pPr>
           </a:lstStyle>
           <a:p>
             <a:r>
@@ -2895,6 +3728,39 @@
                 <a:cs typeface="Yu Gothic"/>
               </a:defRPr>
             </a:lvl1pPr>
+            <a:lvl2pPr algn="ctr" marL="0" indent="0">
+              <a:buNone/>
+              <a:defRPr sz="1050" b="0">
+                <a:solidFill>
+                  <a:srgbClr val="8A8580"/>
+                </a:solidFill>
+                <a:latin typeface="Yu Gothic"/>
+                <a:ea typeface="Yu Gothic"/>
+                <a:cs typeface="Yu Gothic"/>
+              </a:defRPr>
+            </a:lvl2pPr>
+            <a:lvl3pPr algn="ctr" marL="0" indent="0">
+              <a:buNone/>
+              <a:defRPr sz="900" b="0">
+                <a:solidFill>
+                  <a:srgbClr val="8A8580"/>
+                </a:solidFill>
+                <a:latin typeface="Yu Gothic"/>
+                <a:ea typeface="Yu Gothic"/>
+                <a:cs typeface="Yu Gothic"/>
+              </a:defRPr>
+            </a:lvl3pPr>
+            <a:lvl4pPr algn="ctr" marL="0" indent="0">
+              <a:buNone/>
+              <a:defRPr sz="750" b="0">
+                <a:solidFill>
+                  <a:srgbClr val="8A8580"/>
+                </a:solidFill>
+                <a:latin typeface="Yu Gothic"/>
+                <a:ea typeface="Yu Gothic"/>
+                <a:cs typeface="Yu Gothic"/>
+              </a:defRPr>
+            </a:lvl4pPr>
           </a:lstStyle>
           <a:p>
             <a:r>
@@ -3318,6 +4184,39 @@
                 <a:cs typeface="Yu Gothic"/>
               </a:defRPr>
             </a:lvl1pPr>
+            <a:lvl2pPr algn="l" marL="0" indent="0">
+              <a:buNone/>
+              <a:defRPr sz="1600" b="1">
+                <a:solidFill>
+                  <a:srgbClr val="FF4D3D"/>
+                </a:solidFill>
+                <a:latin typeface="Yu Gothic"/>
+                <a:ea typeface="Yu Gothic"/>
+                <a:cs typeface="Yu Gothic"/>
+              </a:defRPr>
+            </a:lvl2pPr>
+            <a:lvl3pPr algn="l" marL="0" indent="0">
+              <a:buNone/>
+              <a:defRPr sz="1350" b="1">
+                <a:solidFill>
+                  <a:srgbClr val="FF4D3D"/>
+                </a:solidFill>
+                <a:latin typeface="Yu Gothic"/>
+                <a:ea typeface="Yu Gothic"/>
+                <a:cs typeface="Yu Gothic"/>
+              </a:defRPr>
+            </a:lvl3pPr>
+            <a:lvl4pPr algn="l" marL="0" indent="0">
+              <a:buNone/>
+              <a:defRPr sz="1150" b="1">
+                <a:solidFill>
+                  <a:srgbClr val="FF4D3D"/>
+                </a:solidFill>
+                <a:latin typeface="Yu Gothic"/>
+                <a:ea typeface="Yu Gothic"/>
+                <a:cs typeface="Yu Gothic"/>
+              </a:defRPr>
+            </a:lvl4pPr>
           </a:lstStyle>
           <a:p>
             <a:r>
@@ -3357,6 +4256,39 @@
                 <a:cs typeface="Yu Gothic"/>
               </a:defRPr>
             </a:lvl1pPr>
+            <a:lvl2pPr algn="l" marL="0" indent="0">
+              <a:buNone/>
+              <a:defRPr sz="1250" b="0">
+                <a:solidFill>
+                  <a:srgbClr val="F5EFE5"/>
+                </a:solidFill>
+                <a:latin typeface="Yu Gothic"/>
+                <a:ea typeface="Yu Gothic"/>
+                <a:cs typeface="Yu Gothic"/>
+              </a:defRPr>
+            </a:lvl2pPr>
+            <a:lvl3pPr algn="l" marL="0" indent="0">
+              <a:buNone/>
+              <a:defRPr sz="1050" b="0">
+                <a:solidFill>
+                  <a:srgbClr val="F5EFE5"/>
+                </a:solidFill>
+                <a:latin typeface="Yu Gothic"/>
+                <a:ea typeface="Yu Gothic"/>
+                <a:cs typeface="Yu Gothic"/>
+              </a:defRPr>
+            </a:lvl3pPr>
+            <a:lvl4pPr algn="l" marL="0" indent="0">
+              <a:buNone/>
+              <a:defRPr sz="900" b="0">
+                <a:solidFill>
+                  <a:srgbClr val="F5EFE5"/>
+                </a:solidFill>
+                <a:latin typeface="Yu Gothic"/>
+                <a:ea typeface="Yu Gothic"/>
+                <a:cs typeface="Yu Gothic"/>
+              </a:defRPr>
+            </a:lvl4pPr>
           </a:lstStyle>
           <a:p>
             <a:r>
@@ -3396,6 +4328,39 @@
                 <a:cs typeface="Yu Gothic"/>
               </a:defRPr>
             </a:lvl1pPr>
+            <a:lvl2pPr algn="l" marL="0" indent="0">
+              <a:buNone/>
+              <a:defRPr sz="1600" b="1">
+                <a:solidFill>
+                  <a:srgbClr val="FFFFFF"/>
+                </a:solidFill>
+                <a:latin typeface="Yu Gothic"/>
+                <a:ea typeface="Yu Gothic"/>
+                <a:cs typeface="Yu Gothic"/>
+              </a:defRPr>
+            </a:lvl2pPr>
+            <a:lvl3pPr algn="l" marL="0" indent="0">
+              <a:buNone/>
+              <a:defRPr sz="1350" b="1">
+                <a:solidFill>
+                  <a:srgbClr val="FFFFFF"/>
+                </a:solidFill>
+                <a:latin typeface="Yu Gothic"/>
+                <a:ea typeface="Yu Gothic"/>
+                <a:cs typeface="Yu Gothic"/>
+              </a:defRPr>
+            </a:lvl3pPr>
+            <a:lvl4pPr algn="l" marL="0" indent="0">
+              <a:buNone/>
+              <a:defRPr sz="1150" b="1">
+                <a:solidFill>
+                  <a:srgbClr val="FFFFFF"/>
+                </a:solidFill>
+                <a:latin typeface="Yu Gothic"/>
+                <a:ea typeface="Yu Gothic"/>
+                <a:cs typeface="Yu Gothic"/>
+              </a:defRPr>
+            </a:lvl4pPr>
           </a:lstStyle>
           <a:p>
             <a:r>
@@ -3435,6 +4400,39 @@
                 <a:cs typeface="Yu Gothic"/>
               </a:defRPr>
             </a:lvl1pPr>
+            <a:lvl2pPr algn="l" marL="0" indent="0">
+              <a:buNone/>
+              <a:defRPr sz="1250" b="0">
+                <a:solidFill>
+                  <a:srgbClr val="FFF3F1"/>
+                </a:solidFill>
+                <a:latin typeface="Yu Gothic"/>
+                <a:ea typeface="Yu Gothic"/>
+                <a:cs typeface="Yu Gothic"/>
+              </a:defRPr>
+            </a:lvl2pPr>
+            <a:lvl3pPr algn="l" marL="0" indent="0">
+              <a:buNone/>
+              <a:defRPr sz="1050" b="0">
+                <a:solidFill>
+                  <a:srgbClr val="FFF3F1"/>
+                </a:solidFill>
+                <a:latin typeface="Yu Gothic"/>
+                <a:ea typeface="Yu Gothic"/>
+                <a:cs typeface="Yu Gothic"/>
+              </a:defRPr>
+            </a:lvl3pPr>
+            <a:lvl4pPr algn="l" marL="0" indent="0">
+              <a:buNone/>
+              <a:defRPr sz="900" b="0">
+                <a:solidFill>
+                  <a:srgbClr val="FFF3F1"/>
+                </a:solidFill>
+                <a:latin typeface="Yu Gothic"/>
+                <a:ea typeface="Yu Gothic"/>
+                <a:cs typeface="Yu Gothic"/>
+              </a:defRPr>
+            </a:lvl4pPr>
           </a:lstStyle>
           <a:p>
             <a:r>
@@ -3565,6 +4563,27 @@
                 </a:solidFill>
               </a:defRPr>
             </a:lvl1pPr>
+            <a:lvl2pPr algn="l">
+              <a:defRPr sz="1250" b="0">
+                <a:solidFill>
+                  <a:srgbClr val="8A8580"/>
+                </a:solidFill>
+              </a:defRPr>
+            </a:lvl2pPr>
+            <a:lvl3pPr algn="l">
+              <a:defRPr sz="1050" b="0">
+                <a:solidFill>
+                  <a:srgbClr val="8A8580"/>
+                </a:solidFill>
+              </a:defRPr>
+            </a:lvl3pPr>
+            <a:lvl4pPr algn="l">
+              <a:defRPr sz="900" b="0">
+                <a:solidFill>
+                  <a:srgbClr val="8A8580"/>
+                </a:solidFill>
+              </a:defRPr>
+            </a:lvl4pPr>
           </a:lstStyle>
           <a:p>
             <a:pPr lvl="0"/>
@@ -4157,28 +5176,28 @@
           <a:bodyPr anchor="t"/>
           <a:lstStyle>
             <a:lvl2pPr>
-              <a:defRPr sz="2400"/>
+              <a:defRPr sz="1150"/>
             </a:lvl2pPr>
             <a:lvl3pPr>
-              <a:defRPr sz="2000"/>
+              <a:defRPr sz="950"/>
             </a:lvl3pPr>
             <a:lvl4pPr>
-              <a:defRPr sz="1800"/>
+              <a:defRPr sz="850"/>
             </a:lvl4pPr>
             <a:lvl5pPr>
-              <a:defRPr sz="1800"/>
+              <a:defRPr sz="850"/>
             </a:lvl5pPr>
             <a:lvl6pPr>
-              <a:defRPr sz="1800"/>
+              <a:defRPr sz="850"/>
             </a:lvl6pPr>
             <a:lvl7pPr>
-              <a:defRPr sz="1800"/>
+              <a:defRPr sz="850"/>
             </a:lvl7pPr>
             <a:lvl8pPr>
-              <a:defRPr sz="1800"/>
+              <a:defRPr sz="850"/>
             </a:lvl8pPr>
             <a:lvl9pPr>
-              <a:defRPr sz="1800"/>
+              <a:defRPr sz="850"/>
             </a:lvl9pPr>
             <a:lvl1pPr algn="l">
               <a:defRPr sz="1500" b="0">
@@ -4246,28 +5265,28 @@
           <a:bodyPr anchor="t"/>
           <a:lstStyle>
             <a:lvl2pPr>
-              <a:defRPr sz="2400"/>
+              <a:defRPr sz="1150"/>
             </a:lvl2pPr>
             <a:lvl3pPr>
-              <a:defRPr sz="2000"/>
+              <a:defRPr sz="950"/>
             </a:lvl3pPr>
             <a:lvl4pPr>
-              <a:defRPr sz="1800"/>
+              <a:defRPr sz="850"/>
             </a:lvl4pPr>
             <a:lvl5pPr>
-              <a:defRPr sz="1800"/>
+              <a:defRPr sz="850"/>
             </a:lvl5pPr>
             <a:lvl6pPr>
-              <a:defRPr sz="1800"/>
+              <a:defRPr sz="850"/>
             </a:lvl6pPr>
             <a:lvl7pPr>
-              <a:defRPr sz="1800"/>
+              <a:defRPr sz="850"/>
             </a:lvl7pPr>
             <a:lvl8pPr>
-              <a:defRPr sz="1800"/>
+              <a:defRPr sz="850"/>
             </a:lvl8pPr>
             <a:lvl9pPr>
-              <a:defRPr sz="1800"/>
+              <a:defRPr sz="850"/>
             </a:lvl9pPr>
             <a:lvl1pPr algn="l">
               <a:defRPr sz="1500" b="0">
@@ -4576,11 +5595,11 @@
           <a:lstStyle>
             <a:lvl2pPr marL="457200" indent="0">
               <a:buNone/>
-              <a:defRPr sz="2000" b="1"/>
+              <a:defRPr sz="1000" b="1"/>
             </a:lvl2pPr>
             <a:lvl3pPr marL="914400" indent="0">
               <a:buNone/>
-              <a:defRPr sz="1800" b="1"/>
+              <a:defRPr sz="900" b="1"/>
             </a:lvl3pPr>
             <a:lvl4pPr marL="1371600" indent="0">
               <a:buNone/>
@@ -4644,28 +5663,28 @@
           <a:bodyPr anchor="t"/>
           <a:lstStyle>
             <a:lvl2pPr>
-              <a:defRPr sz="2000"/>
+              <a:defRPr sz="950"/>
             </a:lvl2pPr>
             <a:lvl3pPr>
-              <a:defRPr sz="1800"/>
+              <a:defRPr sz="850"/>
             </a:lvl3pPr>
             <a:lvl4pPr>
-              <a:defRPr sz="1600"/>
+              <a:defRPr sz="750"/>
             </a:lvl4pPr>
             <a:lvl5pPr>
-              <a:defRPr sz="1600"/>
+              <a:defRPr sz="750"/>
             </a:lvl5pPr>
             <a:lvl6pPr>
-              <a:defRPr sz="1600"/>
+              <a:defRPr sz="750"/>
             </a:lvl6pPr>
             <a:lvl7pPr>
-              <a:defRPr sz="1600"/>
+              <a:defRPr sz="750"/>
             </a:lvl7pPr>
             <a:lvl8pPr>
-              <a:defRPr sz="1600"/>
+              <a:defRPr sz="750"/>
             </a:lvl8pPr>
             <a:lvl9pPr>
-              <a:defRPr sz="1600"/>
+              <a:defRPr sz="750"/>
             </a:lvl9pPr>
             <a:lvl1pPr algn="l">
               <a:defRPr sz="1500" b="0">
@@ -4734,35 +5753,35 @@
           <a:lstStyle>
             <a:lvl2pPr marL="457200" indent="0">
               <a:buNone/>
-              <a:defRPr sz="2000" b="1"/>
+              <a:defRPr sz="100" b="1"/>
             </a:lvl2pPr>
             <a:lvl3pPr marL="914400" indent="0">
               <a:buNone/>
-              <a:defRPr sz="1800" b="1"/>
+              <a:defRPr sz="100" b="1"/>
             </a:lvl3pPr>
             <a:lvl4pPr marL="1371600" indent="0">
               <a:buNone/>
-              <a:defRPr sz="1600" b="1"/>
+              <a:defRPr sz="100" b="1"/>
             </a:lvl4pPr>
             <a:lvl5pPr marL="1828800" indent="0">
               <a:buNone/>
-              <a:defRPr sz="1600" b="1"/>
+              <a:defRPr sz="100" b="1"/>
             </a:lvl5pPr>
             <a:lvl6pPr marL="2286000" indent="0">
               <a:buNone/>
-              <a:defRPr sz="1600" b="1"/>
+              <a:defRPr sz="100" b="1"/>
             </a:lvl6pPr>
             <a:lvl7pPr marL="2743200" indent="0">
               <a:buNone/>
-              <a:defRPr sz="1600" b="1"/>
+              <a:defRPr sz="100" b="1"/>
             </a:lvl7pPr>
             <a:lvl8pPr marL="3200400" indent="0">
               <a:buNone/>
-              <a:defRPr sz="1600" b="1"/>
+              <a:defRPr sz="100" b="1"/>
             </a:lvl8pPr>
             <a:lvl9pPr marL="3657600" indent="0">
               <a:buNone/>
-              <a:defRPr sz="1600" b="1"/>
+              <a:defRPr sz="100" b="1"/>
             </a:lvl9pPr>
             <a:lvl1pPr algn="l" indent="0" marL="0">
               <a:buNone/>
@@ -4802,28 +5821,28 @@
           <a:bodyPr anchor="t"/>
           <a:lstStyle>
             <a:lvl2pPr>
-              <a:defRPr sz="2000"/>
+              <a:defRPr sz="900"/>
             </a:lvl2pPr>
             <a:lvl3pPr>
-              <a:defRPr sz="1800"/>
+              <a:defRPr sz="800"/>
             </a:lvl3pPr>
             <a:lvl4pPr>
-              <a:defRPr sz="1600"/>
+              <a:defRPr sz="700"/>
             </a:lvl4pPr>
             <a:lvl5pPr>
-              <a:defRPr sz="1600"/>
+              <a:defRPr sz="700"/>
             </a:lvl5pPr>
             <a:lvl6pPr>
-              <a:defRPr sz="1600"/>
+              <a:defRPr sz="700"/>
             </a:lvl6pPr>
             <a:lvl7pPr>
-              <a:defRPr sz="1600"/>
+              <a:defRPr sz="700"/>
             </a:lvl7pPr>
             <a:lvl8pPr>
-              <a:defRPr sz="1600"/>
+              <a:defRPr sz="700"/>
             </a:lvl8pPr>
             <a:lvl9pPr>
-              <a:defRPr sz="1600"/>
+              <a:defRPr sz="700"/>
             </a:lvl9pPr>
             <a:lvl1pPr algn="l">
               <a:defRPr sz="1400" b="0">
@@ -5146,6 +6165,36 @@
                 <a:ea typeface="Yu Gothic"/>
               </a:defRPr>
             </a:lvl1pPr>
+            <a:lvl2pPr algn="l" marL="0" indent="0">
+              <a:buNone/>
+              <a:defRPr sz="1300" b="1">
+                <a:solidFill>
+                  <a:srgbClr val="8A8580"/>
+                </a:solidFill>
+                <a:latin typeface="Yu Gothic"/>
+                <a:ea typeface="Yu Gothic"/>
+              </a:defRPr>
+            </a:lvl2pPr>
+            <a:lvl3pPr algn="l" marL="0" indent="0">
+              <a:buNone/>
+              <a:defRPr sz="1150" b="1">
+                <a:solidFill>
+                  <a:srgbClr val="8A8580"/>
+                </a:solidFill>
+                <a:latin typeface="Yu Gothic"/>
+                <a:ea typeface="Yu Gothic"/>
+              </a:defRPr>
+            </a:lvl3pPr>
+            <a:lvl4pPr algn="l" marL="0" indent="0">
+              <a:buNone/>
+              <a:defRPr sz="950" b="1">
+                <a:solidFill>
+                  <a:srgbClr val="8A8580"/>
+                </a:solidFill>
+                <a:latin typeface="Yu Gothic"/>
+                <a:ea typeface="Yu Gothic"/>
+              </a:defRPr>
+            </a:lvl4pPr>
           </a:lstStyle>
           <a:p>
             <a:r>
@@ -5218,6 +6267,30 @@
                 </a:solidFill>
               </a:defRPr>
             </a:lvl1pPr>
+            <a:lvl2pPr algn="l" marL="0" indent="0">
+              <a:buNone/>
+              <a:defRPr sz="1250" b="0">
+                <a:solidFill>
+                  <a:srgbClr val="21201E"/>
+                </a:solidFill>
+              </a:defRPr>
+            </a:lvl2pPr>
+            <a:lvl3pPr algn="l" marL="0" indent="0">
+              <a:buNone/>
+              <a:defRPr sz="1050" b="0">
+                <a:solidFill>
+                  <a:srgbClr val="21201E"/>
+                </a:solidFill>
+              </a:defRPr>
+            </a:lvl3pPr>
+            <a:lvl4pPr algn="l" marL="0" indent="0">
+              <a:buNone/>
+              <a:defRPr sz="900" b="0">
+                <a:solidFill>
+                  <a:srgbClr val="21201E"/>
+                </a:solidFill>
+              </a:defRPr>
+            </a:lvl4pPr>
           </a:lstStyle>
           <a:p>
             <a:r>
